--- a/courseware/DSA_CH05_Binary_Tree.pptx
+++ b/courseware/DSA_CH05_Binary_Tree.pptx
@@ -12947,7 +12947,7 @@
                 <a:latin typeface="Segoe UI"/>
                 <a:ea typeface="微软雅黑"/>
               </a:rPr>
-              <a:t>•  先把堆放大成同高度的</a:t>
+              <a:t>•  先把堆放大成同高度、</a:t>
             </a:r>
             <a:r>
               <a:rPr sz="2000" b="1" i="0">
@@ -12957,7 +12957,7 @@
                 <a:latin typeface="Segoe UI"/>
                 <a:ea typeface="微软雅黑"/>
               </a:rPr>
-              <a:t>满二叉树</a:t>
+              <a:t>每层排满</a:t>
             </a:r>
             <a:r>
               <a:rPr sz="2000" b="0" i="0">
@@ -12967,7 +12967,7 @@
                 <a:latin typeface="Segoe UI"/>
                 <a:ea typeface="微软雅黑"/>
               </a:rPr>
-              <a:t>（每个结点能下沉的距离都不比原来短，所以是上界）</a:t>
+              <a:t>的二叉树（每个结点能下沉的距离都不比原来短，所以是上界）</a:t>
             </a:r>
           </a:p>
           <a:p>
@@ -20022,17 +20022,17 @@
                 <a:latin typeface="Segoe UI"/>
                 <a:ea typeface="微软雅黑"/>
               </a:rPr>
-              <a:t>·  深度为 k 的满二叉树共有 </a:t>
-            </a:r>
-            <a:r>
-              <a:rPr sz="1541" b="0" i="0">
-                <a:solidFill>
-                  <a:srgbClr val="6B7582"/>
-                </a:solidFill>
-                <a:latin typeface="Consolas"/>
-                <a:ea typeface="Consolas"/>
-              </a:rPr>
-              <a:t>2^(k+1) - 1</a:t>
+              <a:t>·  只要求没有度为 1 的结点，</a:t>
+            </a:r>
+            <a:r>
+              <a:rPr sz="1639" b="1" i="0">
+                <a:solidFill>
+                  <a:srgbClr val="6B7582"/>
+                </a:solidFill>
+                <a:latin typeface="Segoe UI"/>
+                <a:ea typeface="微软雅黑"/>
+              </a:rPr>
+              <a:t>不要求叶在同一层</a:t>
             </a:r>
             <a:r>
               <a:rPr sz="1639" b="0" i="0">
@@ -20042,7 +20042,7 @@
                 <a:latin typeface="Segoe UI"/>
                 <a:ea typeface="微软雅黑"/>
               </a:rPr>
-              <a:t> 个结点，叶在同一层</a:t>
+              <a:t>（每层排满的 perfect 树是特例）</a:t>
             </a:r>
           </a:p>
           <a:p>
@@ -20161,7 +20161,27 @@
                 <a:latin typeface="Segoe UI"/>
                 <a:ea typeface="微软雅黑"/>
               </a:rPr>
-              <a:t>·  满二叉树一定完全，完全二叉树不一定满</a:t>
+              <a:t>·  </a:t>
+            </a:r>
+            <a:r>
+              <a:rPr sz="1639" b="1" i="0">
+                <a:solidFill>
+                  <a:srgbClr val="6B7582"/>
+                </a:solidFill>
+                <a:latin typeface="Segoe UI"/>
+                <a:ea typeface="微软雅黑"/>
+              </a:rPr>
+              <a:t>满与完全互不包含</a:t>
+            </a:r>
+            <a:r>
+              <a:rPr sz="1639" b="0" i="0">
+                <a:solidFill>
+                  <a:srgbClr val="6B7582"/>
+                </a:solidFill>
+                <a:latin typeface="Segoe UI"/>
+                <a:ea typeface="微软雅黑"/>
+              </a:rPr>
+              <a:t>：图 5.2(a) 满而不完全，(b) 完全而不满</a:t>
             </a:r>
           </a:p>
           <a:p>

--- a/courseware/DSA_CH05_Binary_Tree.pptx
+++ b/courseware/DSA_CH05_Binary_Tree.pptx
@@ -18697,7 +18697,7 @@
                 <a:latin typeface="Segoe UI"/>
                 <a:ea typeface="微软雅黑"/>
               </a:rPr>
-              <a:t>345 道</a:t>
+              <a:t>344 道</a:t>
             </a:r>
             <a:r>
               <a:rPr sz="1750" b="0" i="0">
